--- a/courses/CC长者课_AI情绪焕新/AI情绪焕新_长者课.pptx
+++ b/courses/CC长者课_AI情绪焕新/AI情绪焕新_长者课.pptx
@@ -4331,9 +4331,9 @@
           <p:nvPr/>
         </p:nvSpPr>
         <p:spPr>
-          <a:xfrm rot="-540000">
-            <a:off x="5394960" y="548640"/>
-            <a:ext cx="2194560" cy="2468880"/>
+          <a:xfrm rot="480000">
+            <a:off x="6720840" y="1828800"/>
+            <a:ext cx="2011680" cy="2286000"/>
           </a:xfrm>
           <a:prstGeom prst="rect">
             <a:avLst/>
@@ -4363,9 +4363,9 @@
           <p:nvPr/>
         </p:nvSpPr>
         <p:spPr>
-          <a:xfrm rot="-540000">
-            <a:off x="5506035" y="681935"/>
-            <a:ext cx="1931213" cy="1942186"/>
+          <a:xfrm rot="480000">
+            <a:off x="6858594" y="1950693"/>
+            <a:ext cx="1770278" cy="1799539"/>
           </a:xfrm>
           <a:prstGeom prst="rect">
             <a:avLst/>
@@ -4396,9 +4396,9 @@
           </a:stretch>
         </p:blipFill>
         <p:spPr>
-          <a:xfrm rot="-540000">
-            <a:off x="5615763" y="821629"/>
-            <a:ext cx="1711757" cy="1662797"/>
+          <a:xfrm rot="480000">
+            <a:off x="6968322" y="2389490"/>
+            <a:ext cx="1550822" cy="921946"/>
           </a:xfrm>
           <a:prstGeom prst="rect">
             <a:avLst/>
@@ -4412,9 +4412,9 @@
           <p:nvPr/>
         </p:nvSpPr>
         <p:spPr>
-          <a:xfrm rot="420000">
-            <a:off x="6629400" y="1600200"/>
-            <a:ext cx="2103120" cy="2377440"/>
+          <a:xfrm rot="-240000">
+            <a:off x="5074920" y="2491740"/>
+            <a:ext cx="1828800" cy="2057400"/>
           </a:xfrm>
           <a:prstGeom prst="rect">
             <a:avLst/>
@@ -4444,9 +4444,9 @@
           <p:nvPr/>
         </p:nvSpPr>
         <p:spPr>
-          <a:xfrm rot="420000">
-            <a:off x="6771077" y="1727335"/>
-            <a:ext cx="1850746" cy="1870862"/>
+          <a:xfrm rot="-240000">
+            <a:off x="5175718" y="2601780"/>
+            <a:ext cx="1609344" cy="1581912"/>
           </a:xfrm>
           <a:prstGeom prst="rect">
             <a:avLst/>
@@ -4477,9 +4477,9 @@
           </a:stretch>
         </p:blipFill>
         <p:spPr>
-          <a:xfrm rot="420000">
-            <a:off x="6880805" y="2177875"/>
-            <a:ext cx="1631290" cy="969782"/>
+          <a:xfrm rot="-240000">
+            <a:off x="5285446" y="2958318"/>
+            <a:ext cx="1389888" cy="868836"/>
           </a:xfrm>
           <a:prstGeom prst="rect">
             <a:avLst/>
@@ -4493,9 +4493,9 @@
           <p:nvPr/>
         </p:nvSpPr>
         <p:spPr>
-          <a:xfrm rot="-120000">
-            <a:off x="5166360" y="2400300"/>
-            <a:ext cx="1920240" cy="2148840"/>
+          <a:xfrm rot="-360000">
+            <a:off x="5669280" y="594360"/>
+            <a:ext cx="2286000" cy="2560320"/>
           </a:xfrm>
           <a:prstGeom prst="rect">
             <a:avLst/>
@@ -4525,9 +4525,9 @@
           <p:nvPr/>
         </p:nvSpPr>
         <p:spPr>
-          <a:xfrm rot="-120000">
-            <a:off x="5277202" y="2515591"/>
-            <a:ext cx="1689811" cy="1667866"/>
+          <a:xfrm rot="-360000">
+            <a:off x="5792198" y="732266"/>
+            <a:ext cx="2011680" cy="2013509"/>
           </a:xfrm>
           <a:prstGeom prst="rect">
             <a:avLst/>
@@ -4558,9 +4558,9 @@
           </a:stretch>
         </p:blipFill>
         <p:spPr>
-          <a:xfrm rot="-120000">
-            <a:off x="5386930" y="2889955"/>
-            <a:ext cx="1470355" cy="919137"/>
+          <a:xfrm rot="-360000">
+            <a:off x="5901926" y="868540"/>
+            <a:ext cx="1792224" cy="1740962"/>
           </a:xfrm>
           <a:prstGeom prst="rect">
             <a:avLst/>
@@ -5646,8 +5646,8 @@
         </p:blipFill>
         <p:spPr>
           <a:xfrm>
-            <a:off x="6035040" y="1459625"/>
-            <a:ext cx="2834640" cy="2841470"/>
+            <a:off x="6035040" y="1778226"/>
+            <a:ext cx="2834640" cy="2204268"/>
           </a:xfrm>
           <a:prstGeom prst="rect">
             <a:avLst/>
@@ -5924,7 +5924,7 @@
                 <a:ea typeface="Microsoft YaHei" pitchFamily="34" charset="-122"/>
                 <a:cs typeface="Microsoft YaHei" pitchFamily="34" charset="-120"/>
               </a:rPr>
-              <a:t>写：「修复旧照片，变清楚，补上颜色」</a:t>
+              <a:t>写：「修复旧照片，补上颜色」</a:t>
             </a:r>
             <a:endParaRPr lang="en-US" sz="2400" dirty="0"/>
           </a:p>
@@ -6897,7 +6897,7 @@
                 <a:ea typeface="Microsoft YaHei" pitchFamily="34" charset="-122"/>
                 <a:cs typeface="Microsoft YaHei" pitchFamily="34" charset="-120"/>
               </a:rPr>
-              <a:t>换样子：「穿上旗袍，开心地笑」</a:t>
+              <a:t>换样子：「穿上旗袍，笑一笑」</a:t>
             </a:r>
             <a:endParaRPr lang="en-US" sz="2400" dirty="0"/>
           </a:p>
@@ -7214,7 +7214,7 @@
                 <a:ea typeface="Microsoft YaHei" pitchFamily="34" charset="-122"/>
                 <a:cs typeface="Microsoft YaHei" pitchFamily="34" charset="-120"/>
               </a:rPr>
-              <a:t>  互动时间</a:t>
+              <a:t>互动时间</a:t>
             </a:r>
             <a:endParaRPr lang="en-US" sz="2000" dirty="0"/>
           </a:p>
@@ -7513,8 +7513,8 @@
         </p:blipFill>
         <p:spPr>
           <a:xfrm>
-            <a:off x="6688648" y="1600200"/>
-            <a:ext cx="1801743" cy="2377440"/>
+            <a:off x="6355080" y="1818662"/>
+            <a:ext cx="2468880" cy="1940516"/>
           </a:xfrm>
           <a:prstGeom prst="rect">
             <a:avLst/>
@@ -8219,7 +8219,7 @@
                 <a:ea typeface="Microsoft YaHei" pitchFamily="34" charset="-122"/>
                 <a:cs typeface="Microsoft YaHei" pitchFamily="34" charset="-120"/>
               </a:rPr>
-              <a:t>点「生成」，选「照片生成视频」</a:t>
+              <a:t>点「生成」→「照片生成视频」</a:t>
             </a:r>
             <a:endParaRPr lang="en-US" sz="2400" dirty="0"/>
           </a:p>
@@ -8704,7 +8704,7 @@
                 <a:ea typeface="Microsoft YaHei" pitchFamily="34" charset="-122"/>
                 <a:cs typeface="Microsoft YaHei" pitchFamily="34" charset="-120"/>
               </a:rPr>
-              <a:t>  互动时间</a:t>
+              <a:t>互动时间</a:t>
             </a:r>
             <a:endParaRPr lang="en-US" sz="2000" dirty="0"/>
           </a:p>
@@ -9817,7 +9817,7 @@
                 <a:ea typeface="Microsoft YaHei" pitchFamily="34" charset="-122"/>
                 <a:cs typeface="Microsoft YaHei" pitchFamily="34" charset="-120"/>
               </a:rPr>
-              <a:t>  互动时间</a:t>
+              <a:t>互动时间</a:t>
             </a:r>
             <a:endParaRPr lang="en-US" sz="2000" dirty="0"/>
           </a:p>
@@ -11031,7 +11031,7 @@
         <p:spPr>
           <a:xfrm>
             <a:off x="1143000" y="1325880"/>
-            <a:ext cx="5029200" cy="853440"/>
+            <a:ext cx="4846320" cy="853440"/>
           </a:xfrm>
           <a:prstGeom prst="rect">
             <a:avLst/>
@@ -11095,7 +11095,7 @@
         <p:spPr>
           <a:xfrm>
             <a:off x="1143000" y="2179320"/>
-            <a:ext cx="5029200" cy="853440"/>
+            <a:ext cx="4846320" cy="853440"/>
           </a:xfrm>
           <a:prstGeom prst="rect">
             <a:avLst/>
@@ -11159,7 +11159,7 @@
         <p:spPr>
           <a:xfrm>
             <a:off x="1143000" y="3032760"/>
-            <a:ext cx="5029200" cy="853440"/>
+            <a:ext cx="4846320" cy="853440"/>
           </a:xfrm>
           <a:prstGeom prst="rect">
             <a:avLst/>
@@ -11205,8 +11205,8 @@
         </p:blipFill>
         <p:spPr>
           <a:xfrm>
-            <a:off x="6172200" y="2040988"/>
-            <a:ext cx="2606040" cy="1495865"/>
+            <a:off x="6400800" y="2198036"/>
+            <a:ext cx="2377440" cy="1364648"/>
           </a:xfrm>
           <a:prstGeom prst="rect">
             <a:avLst/>
@@ -11446,7 +11446,7 @@
                 <a:ea typeface="Microsoft YaHei" pitchFamily="34" charset="-122"/>
                 <a:cs typeface="Microsoft YaHei" pitchFamily="34" charset="-120"/>
               </a:rPr>
-              <a:t>选一个节日：新年、屠妖节、圣诞节</a:t>
+              <a:t>选个节日：新年、屠妖节</a:t>
             </a:r>
             <a:endParaRPr lang="en-US" sz="2400" dirty="0"/>
           </a:p>
@@ -12722,7 +12722,7 @@
                 <a:ea typeface="Microsoft YaHei" pitchFamily="34" charset="-122"/>
                 <a:cs typeface="Microsoft YaHei" pitchFamily="34" charset="-120"/>
               </a:rPr>
-              <a:t>  互动时间</a:t>
+              <a:t>互动时间</a:t>
             </a:r>
             <a:endParaRPr lang="en-US" sz="2000" dirty="0"/>
           </a:p>
@@ -13732,7 +13732,7 @@
         <p:spPr>
           <a:xfrm>
             <a:off x="1143000" y="1325880"/>
-            <a:ext cx="5029200" cy="853440"/>
+            <a:ext cx="4846320" cy="853440"/>
           </a:xfrm>
           <a:prstGeom prst="rect">
             <a:avLst/>
@@ -13796,7 +13796,7 @@
         <p:spPr>
           <a:xfrm>
             <a:off x="1143000" y="2179320"/>
-            <a:ext cx="5029200" cy="853440"/>
+            <a:ext cx="4846320" cy="853440"/>
           </a:xfrm>
           <a:prstGeom prst="rect">
             <a:avLst/>
@@ -13820,7 +13820,7 @@
                 <a:ea typeface="Microsoft YaHei" pitchFamily="34" charset="-122"/>
                 <a:cs typeface="Microsoft YaHei" pitchFamily="34" charset="-120"/>
               </a:rPr>
-              <a:t>视频、直播里的人，可能是 AI 做的</a:t>
+              <a:t>视频、直播，也可能是 AI 做的</a:t>
             </a:r>
             <a:endParaRPr lang="en-US" sz="2400" dirty="0"/>
           </a:p>
@@ -13860,7 +13860,7 @@
         <p:spPr>
           <a:xfrm>
             <a:off x="1143000" y="3032760"/>
-            <a:ext cx="5029200" cy="853440"/>
+            <a:ext cx="4846320" cy="853440"/>
           </a:xfrm>
           <a:prstGeom prst="rect">
             <a:avLst/>
@@ -13906,8 +13906,8 @@
         </p:blipFill>
         <p:spPr>
           <a:xfrm>
-            <a:off x="6172200" y="1442890"/>
-            <a:ext cx="2606040" cy="2692060"/>
+            <a:off x="6400800" y="1652403"/>
+            <a:ext cx="2377440" cy="2455914"/>
           </a:xfrm>
           <a:prstGeom prst="rect">
             <a:avLst/>
@@ -14103,7 +14103,7 @@
         <p:spPr>
           <a:xfrm>
             <a:off x="1143000" y="1325880"/>
-            <a:ext cx="5029200" cy="914400"/>
+            <a:ext cx="4846320" cy="914400"/>
           </a:xfrm>
           <a:prstGeom prst="rect">
             <a:avLst/>
@@ -14127,7 +14127,7 @@
                 <a:ea typeface="Microsoft YaHei" pitchFamily="34" charset="-122"/>
                 <a:cs typeface="Microsoft YaHei" pitchFamily="34" charset="-120"/>
               </a:rPr>
-              <a:t>作品没水印，分享时说明是 AI 做的</a:t>
+              <a:t>分享作品时，说明是 AI 做的</a:t>
             </a:r>
             <a:endParaRPr lang="en-US" sz="2400" dirty="0"/>
           </a:p>
@@ -14167,7 +14167,7 @@
         <p:spPr>
           <a:xfrm>
             <a:off x="1143000" y="2240280"/>
-            <a:ext cx="5029200" cy="914400"/>
+            <a:ext cx="4846320" cy="914400"/>
           </a:xfrm>
           <a:prstGeom prst="rect">
             <a:avLst/>
@@ -14231,7 +14231,7 @@
         <p:spPr>
           <a:xfrm>
             <a:off x="1143000" y="3154680"/>
-            <a:ext cx="5029200" cy="914400"/>
+            <a:ext cx="4846320" cy="914400"/>
           </a:xfrm>
           <a:prstGeom prst="rect">
             <a:avLst/>
@@ -14277,8 +14277,8 @@
         </p:blipFill>
         <p:spPr>
           <a:xfrm>
-            <a:off x="6172200" y="1657598"/>
-            <a:ext cx="2606040" cy="2262645"/>
+            <a:off x="6400800" y="1848276"/>
+            <a:ext cx="2377440" cy="2064167"/>
           </a:xfrm>
           <a:prstGeom prst="rect">
             <a:avLst/>
@@ -14665,8 +14665,8 @@
         </p:blipFill>
         <p:spPr>
           <a:xfrm>
-            <a:off x="7007380" y="109728"/>
-            <a:ext cx="1621479" cy="1143000"/>
+            <a:off x="7137099" y="274320"/>
+            <a:ext cx="1362043" cy="960120"/>
           </a:xfrm>
           <a:prstGeom prst="rect">
             <a:avLst/>
@@ -16859,7 +16859,7 @@
                 <a:ea typeface="Microsoft YaHei" pitchFamily="34" charset="-122"/>
                 <a:cs typeface="Microsoft YaHei" pitchFamily="34" charset="-120"/>
               </a:rPr>
-              <a:t>设一个密码（也可以用 Google 账号登录）</a:t>
+              <a:t>设一个密码，写在纸上</a:t>
             </a:r>
             <a:endParaRPr lang="en-US" sz="2400" dirty="0"/>
           </a:p>
@@ -17092,7 +17092,7 @@
                 <a:ea typeface="Microsoft YaHei" pitchFamily="34" charset="-122"/>
                 <a:cs typeface="Microsoft YaHei" pitchFamily="34" charset="-120"/>
               </a:rPr>
-              <a:t>  互动时间</a:t>
+              <a:t>互动时间</a:t>
             </a:r>
             <a:endParaRPr lang="en-US" sz="2000" dirty="0"/>
           </a:p>
@@ -17408,7 +17408,7 @@
         <p:spPr>
           <a:xfrm>
             <a:off x="548640" y="4023360"/>
-            <a:ext cx="5440680" cy="566928"/>
+            <a:ext cx="5431536" cy="566928"/>
           </a:xfrm>
           <a:prstGeom prst="roundRect">
             <a:avLst>
@@ -17440,7 +17440,7 @@
                 <a:ea typeface="Microsoft YaHei" pitchFamily="34" charset="-122"/>
                 <a:cs typeface="Microsoft YaHei" pitchFamily="34" charset="-120"/>
               </a:rPr>
-              <a:t>三样都打勾，我们就开始做第一个作品</a:t>
+              <a:t>都打勾了，就开始做第一个作品</a:t>
             </a:r>
             <a:endParaRPr lang="en-US" sz="2400" dirty="0"/>
           </a:p>
